--- a/dcx/DCX_워크시트_독수리5형제.pptx
+++ b/dcx/DCX_워크시트_독수리5형제.pptx
@@ -8351,7 +8351,7 @@
                 </a:solidFill>
                 <a:latin typeface="맑은 고딕"/>
               </a:rPr>
-              <a:t>LDA 토픽 4(병원 검색·정보)가 588건(18.4%)으로 불만 토픽 중 가장 크고, 평균 별점 3.92점으로 만족과 불만이 갈린다. AI로 해결 가능한 구간이 바로 여기다.</a:t>
+              <a:t>LDA 토픽 4(병원 검색·정보)가 588건(18.4%)으로 AI로 풀 수 있는 토픽 중 가장 크고, 평균 별점 3.92점으로 만족과 불만이 갈린다. (가장 큰 토픽 1 '예약'은 시스템 문제라 범위 밖)</a:t>
             </a:r>
             <a:endParaRPr>
               <a:latin typeface="+mj-lt"/>
@@ -15770,7 +15770,7 @@
                 </a:solidFill>
                 <a:latin typeface="맑은 고딕"/>
               </a:rPr>
-              <a:t>전국 병원 79,819곳·약국 25,757곳 공공데이터, 진료시간 59,378곳 확보. 네이버·카카오 API가 주지 않는 정보라 따라오기 어렵다.</a:t>
+              <a:t>전국 병원 79,819곳·약국 25,757곳 공공데이터, 진료시간 58,909곳(73.8%) 확보. 네이버·카카오 API가 주지 않는 정보라 따라오기 어렵다.</a:t>
             </a:r>
           </a:p>
         </p:txBody>
